--- a/.lessons/WebSocket/1.pptx
+++ b/.lessons/WebSocket/1.pptx
@@ -6208,7 +6208,7 @@
         <p:spPr>
           <a:xfrm>
             <a:off x="203200" y="244826"/>
-            <a:ext cx="11822545" cy="369332"/>
+            <a:ext cx="11822545" cy="3693319"/>
           </a:xfrm>
           <a:prstGeom prst="rect">
             <a:avLst/>
@@ -6222,15 +6222,203 @@
           <a:lstStyle/>
           <a:p>
             <a:r>
+              <a:rPr lang="az-Latn-AZ">
+                <a:latin typeface="-apple-system"/>
+              </a:rPr>
+              <a:t>Bütün kodlar tam olduqdan sonra  </a:t>
+            </a:r>
+            <a:r>
+              <a:rPr lang="az-Latn-AZ" b="1">
+                <a:latin typeface="-apple-system"/>
+              </a:rPr>
+              <a:t>serveri</a:t>
+            </a:r>
+            <a:r>
               <a:rPr lang="en-US">
                 <a:latin typeface="-apple-system"/>
               </a:rPr>
-              <a:t>.</a:t>
+              <a:t>-</a:t>
+            </a:r>
+            <a:r>
+              <a:rPr lang="az-Latn-AZ">
+                <a:latin typeface="-apple-system"/>
+              </a:rPr>
+              <a:t>i və </a:t>
+            </a:r>
+            <a:r>
+              <a:rPr lang="az-Latn-AZ" b="1">
+                <a:latin typeface="-apple-system"/>
+              </a:rPr>
+              <a:t>client</a:t>
+            </a:r>
+            <a:r>
+              <a:rPr lang="az-Latn-AZ">
+                <a:latin typeface="-apple-system"/>
+              </a:rPr>
+              <a:t> -ı işə salırıq və tətbiqi test edirik.</a:t>
+            </a:r>
+          </a:p>
+          <a:p>
+            <a:endParaRPr lang="az-Latn-AZ">
+              <a:latin typeface="-apple-system"/>
+            </a:endParaRPr>
+          </a:p>
+          <a:p>
+            <a:endParaRPr lang="az-Latn-AZ">
+              <a:latin typeface="-apple-system"/>
+            </a:endParaRPr>
+          </a:p>
+          <a:p>
+            <a:endParaRPr lang="az-Latn-AZ">
+              <a:latin typeface="-apple-system"/>
+            </a:endParaRPr>
+          </a:p>
+          <a:p>
+            <a:endParaRPr lang="az-Latn-AZ">
+              <a:latin typeface="-apple-system"/>
+            </a:endParaRPr>
+          </a:p>
+          <a:p>
+            <a:endParaRPr lang="az-Latn-AZ">
+              <a:latin typeface="-apple-system"/>
+            </a:endParaRPr>
+          </a:p>
+          <a:p>
+            <a:endParaRPr lang="az-Latn-AZ">
+              <a:latin typeface="-apple-system"/>
+            </a:endParaRPr>
+          </a:p>
+          <a:p>
+            <a:endParaRPr lang="az-Latn-AZ">
+              <a:latin typeface="-apple-system"/>
+            </a:endParaRPr>
+          </a:p>
+          <a:p>
+            <a:endParaRPr lang="az-Latn-AZ">
+              <a:latin typeface="-apple-system"/>
+            </a:endParaRPr>
+          </a:p>
+          <a:p>
+            <a:endParaRPr lang="az-Latn-AZ">
+              <a:latin typeface="-apple-system"/>
+            </a:endParaRPr>
+          </a:p>
+          <a:p>
+            <a:endParaRPr lang="az-Latn-AZ">
+              <a:latin typeface="-apple-system"/>
+            </a:endParaRPr>
+          </a:p>
+          <a:p>
+            <a:r>
+              <a:rPr lang="az-Latn-AZ">
+                <a:latin typeface="-apple-system"/>
+              </a:rPr>
+              <a:t>Client -ı </a:t>
+            </a:r>
+            <a:r>
+              <a:rPr lang="az-Latn-AZ" b="1">
+                <a:latin typeface="-apple-system"/>
+              </a:rPr>
+              <a:t>LİVE</a:t>
+            </a:r>
+            <a:r>
+              <a:rPr lang="az-Latn-AZ">
+                <a:latin typeface="-apple-system"/>
+              </a:rPr>
+              <a:t> düyməsi yaxud terminalda yaza biləcəyimiz</a:t>
+            </a:r>
+          </a:p>
+          <a:p>
+            <a:r>
+              <a:rPr lang="az-Latn-AZ" b="1">
+                <a:latin typeface="-apple-system"/>
+              </a:rPr>
+              <a:t>http</a:t>
+            </a:r>
+            <a:r>
+              <a:rPr lang="az-Latn-AZ">
+                <a:latin typeface="-apple-system"/>
+              </a:rPr>
+              <a:t> əmri işə sala bilərik.</a:t>
             </a:r>
             <a:endParaRPr lang="en-US"/>
           </a:p>
         </p:txBody>
       </p:sp>
+      <p:pic>
+        <p:nvPicPr>
+          <p:cNvPr id="3" name="Picture 2">
+            <a:extLst>
+              <a:ext uri="{FF2B5EF4-FFF2-40B4-BE49-F238E27FC236}">
+                <a16:creationId xmlns:a16="http://schemas.microsoft.com/office/drawing/2014/main" id="{7BAAFBED-B3A4-6818-D973-20DD2AA79FB3}"/>
+              </a:ext>
+            </a:extLst>
+          </p:cNvPr>
+          <p:cNvPicPr>
+            <a:picLocks noChangeAspect="1"/>
+          </p:cNvPicPr>
+          <p:nvPr/>
+        </p:nvPicPr>
+        <p:blipFill>
+          <a:blip r:embed="rId2"/>
+          <a:stretch>
+            <a:fillRect/>
+          </a:stretch>
+        </p:blipFill>
+        <p:spPr>
+          <a:xfrm>
+            <a:off x="0" y="1134938"/>
+            <a:ext cx="5948218" cy="1534293"/>
+          </a:xfrm>
+          <a:prstGeom prst="rect">
+            <a:avLst/>
+          </a:prstGeom>
+        </p:spPr>
+      </p:pic>
+      <p:pic>
+        <p:nvPicPr>
+          <p:cNvPr id="4" name="Picture 3">
+            <a:extLst>
+              <a:ext uri="{FF2B5EF4-FFF2-40B4-BE49-F238E27FC236}">
+                <a16:creationId xmlns:a16="http://schemas.microsoft.com/office/drawing/2014/main" id="{5914C66F-E859-4443-9605-8E4D73130F60}"/>
+              </a:ext>
+            </a:extLst>
+          </p:cNvPr>
+          <p:cNvPicPr>
+            <a:picLocks noChangeAspect="1"/>
+          </p:cNvPicPr>
+          <p:nvPr/>
+        </p:nvPicPr>
+        <p:blipFill>
+          <a:blip r:embed="rId3"/>
+          <a:stretch>
+            <a:fillRect/>
+          </a:stretch>
+        </p:blipFill>
+        <p:spPr>
+          <a:xfrm>
+            <a:off x="6785584" y="3047999"/>
+            <a:ext cx="5240161" cy="3672053"/>
+          </a:xfrm>
+          <a:prstGeom prst="rect">
+            <a:avLst/>
+          </a:prstGeom>
+          <a:ln w="38100" cap="sq">
+            <a:solidFill>
+              <a:srgbClr val="000000"/>
+            </a:solidFill>
+            <a:prstDash val="solid"/>
+            <a:miter lim="800000"/>
+          </a:ln>
+          <a:effectLst>
+            <a:outerShdw blurRad="50800" dist="38100" dir="2700000" algn="tl" rotWithShape="0">
+              <a:srgbClr val="000000">
+                <a:alpha val="43000"/>
+              </a:srgbClr>
+            </a:outerShdw>
+          </a:effectLst>
+        </p:spPr>
+      </p:pic>
     </p:spTree>
     <p:extLst>
       <p:ext uri="{BB962C8B-B14F-4D97-AF65-F5344CB8AC3E}">
@@ -6267,44 +6455,6 @@
           <a:chExt cx="0" cy="0"/>
         </a:xfrm>
       </p:grpSpPr>
-      <p:sp>
-        <p:nvSpPr>
-          <p:cNvPr id="7" name="TextBox 6">
-            <a:extLst>
-              <a:ext uri="{FF2B5EF4-FFF2-40B4-BE49-F238E27FC236}">
-                <a16:creationId xmlns:a16="http://schemas.microsoft.com/office/drawing/2014/main" id="{7BE59559-3706-A9E9-FFA6-7FF45A686A9D}"/>
-              </a:ext>
-            </a:extLst>
-          </p:cNvPr>
-          <p:cNvSpPr txBox="1"/>
-          <p:nvPr/>
-        </p:nvSpPr>
-        <p:spPr>
-          <a:xfrm>
-            <a:off x="203200" y="244826"/>
-            <a:ext cx="11822545" cy="369332"/>
-          </a:xfrm>
-          <a:prstGeom prst="rect">
-            <a:avLst/>
-          </a:prstGeom>
-          <a:noFill/>
-        </p:spPr>
-        <p:txBody>
-          <a:bodyPr wrap="square">
-            <a:spAutoFit/>
-          </a:bodyPr>
-          <a:lstStyle/>
-          <a:p>
-            <a:r>
-              <a:rPr lang="en-US">
-                <a:latin typeface="-apple-system"/>
-              </a:rPr>
-              <a:t>.</a:t>
-            </a:r>
-            <a:endParaRPr lang="en-US"/>
-          </a:p>
-        </p:txBody>
-      </p:sp>
     </p:spTree>
     <p:extLst>
       <p:ext uri="{BB962C8B-B14F-4D97-AF65-F5344CB8AC3E}">
